--- a/SolarFlow_Presentation.pptx
+++ b/SolarFlow_Presentation.pptx
@@ -4500,7 +4500,7 @@
                 </a:solidFill>
                 <a:latin typeface="Calibri"/>
               </a:rPr>
-              <a:t>Decree 57 allows households to sell up to 20% of generation — but they can't bid, see acceptance, or verify payments.</a:t>
+              <a:t>Vietnam just raised the sell-back cap from 20% to 50% (Jun 2026) — but households still can't bid, see acceptance, or verify payments.</a:t>
             </a:r>
           </a:p>
         </p:txBody>
@@ -7735,7 +7735,7 @@
                 </a:solidFill>
                 <a:latin typeface="Calibri"/>
               </a:rPr>
-              <a:t>800,000 t</a:t>
+              <a:t>1.36M t</a:t>
             </a:r>
           </a:p>
         </p:txBody>
